--- a/templates/certificate_template2.pptx
+++ b/templates/certificate_template2.pptx
@@ -3346,7 +3346,7 @@
                 <a:ea typeface="Times New Roman" panose="02020603050405020304" pitchFamily="18" charset="0"/>
                 <a:cs typeface="IRLotus" panose="02000503000000020002" pitchFamily="2" charset="-78"/>
               </a:rPr>
-              <a:t>{{org}}</a:t>
+              <a:t>{{org}} {{org2}}</a:t>
             </a:r>
             <a:r>
               <a:rPr lang="fa-IR" sz="2400" b="1" dirty="0">

--- a/templates/certificate_template2.pptx
+++ b/templates/certificate_template2.pptx
@@ -272,7 +272,7 @@
           <a:p>
             <a:fld id="{CDDC06C2-7DBC-4F52-9B39-8D808E2DB5D5}" type="datetimeFigureOut">
               <a:rPr lang="en-US" smtClean="0"/>
-              <a:t>8/30/2026</a:t>
+              <a:t>9/8/2026</a:t>
             </a:fld>
             <a:endParaRPr lang="en-US"/>
           </a:p>
@@ -442,7 +442,7 @@
           <a:p>
             <a:fld id="{CDDC06C2-7DBC-4F52-9B39-8D808E2DB5D5}" type="datetimeFigureOut">
               <a:rPr lang="en-US" smtClean="0"/>
-              <a:t>8/30/2026</a:t>
+              <a:t>9/8/2026</a:t>
             </a:fld>
             <a:endParaRPr lang="en-US"/>
           </a:p>
@@ -622,7 +622,7 @@
           <a:p>
             <a:fld id="{CDDC06C2-7DBC-4F52-9B39-8D808E2DB5D5}" type="datetimeFigureOut">
               <a:rPr lang="en-US" smtClean="0"/>
-              <a:t>8/30/2026</a:t>
+              <a:t>9/8/2026</a:t>
             </a:fld>
             <a:endParaRPr lang="en-US"/>
           </a:p>
@@ -792,7 +792,7 @@
           <a:p>
             <a:fld id="{CDDC06C2-7DBC-4F52-9B39-8D808E2DB5D5}" type="datetimeFigureOut">
               <a:rPr lang="en-US" smtClean="0"/>
-              <a:t>8/30/2026</a:t>
+              <a:t>9/8/2026</a:t>
             </a:fld>
             <a:endParaRPr lang="en-US"/>
           </a:p>
@@ -1036,7 +1036,7 @@
           <a:p>
             <a:fld id="{CDDC06C2-7DBC-4F52-9B39-8D808E2DB5D5}" type="datetimeFigureOut">
               <a:rPr lang="en-US" smtClean="0"/>
-              <a:t>8/30/2026</a:t>
+              <a:t>9/8/2026</a:t>
             </a:fld>
             <a:endParaRPr lang="en-US"/>
           </a:p>
@@ -1268,7 +1268,7 @@
           <a:p>
             <a:fld id="{CDDC06C2-7DBC-4F52-9B39-8D808E2DB5D5}" type="datetimeFigureOut">
               <a:rPr lang="en-US" smtClean="0"/>
-              <a:t>8/30/2026</a:t>
+              <a:t>9/8/2026</a:t>
             </a:fld>
             <a:endParaRPr lang="en-US"/>
           </a:p>
@@ -1635,7 +1635,7 @@
           <a:p>
             <a:fld id="{CDDC06C2-7DBC-4F52-9B39-8D808E2DB5D5}" type="datetimeFigureOut">
               <a:rPr lang="en-US" smtClean="0"/>
-              <a:t>8/30/2026</a:t>
+              <a:t>9/8/2026</a:t>
             </a:fld>
             <a:endParaRPr lang="en-US"/>
           </a:p>
@@ -1753,7 +1753,7 @@
           <a:p>
             <a:fld id="{CDDC06C2-7DBC-4F52-9B39-8D808E2DB5D5}" type="datetimeFigureOut">
               <a:rPr lang="en-US" smtClean="0"/>
-              <a:t>8/30/2026</a:t>
+              <a:t>9/8/2026</a:t>
             </a:fld>
             <a:endParaRPr lang="en-US"/>
           </a:p>
@@ -1848,7 +1848,7 @@
           <a:p>
             <a:fld id="{CDDC06C2-7DBC-4F52-9B39-8D808E2DB5D5}" type="datetimeFigureOut">
               <a:rPr lang="en-US" smtClean="0"/>
-              <a:t>8/30/2026</a:t>
+              <a:t>9/8/2026</a:t>
             </a:fld>
             <a:endParaRPr lang="en-US"/>
           </a:p>
@@ -2125,7 +2125,7 @@
           <a:p>
             <a:fld id="{CDDC06C2-7DBC-4F52-9B39-8D808E2DB5D5}" type="datetimeFigureOut">
               <a:rPr lang="en-US" smtClean="0"/>
-              <a:t>8/30/2026</a:t>
+              <a:t>9/8/2026</a:t>
             </a:fld>
             <a:endParaRPr lang="en-US"/>
           </a:p>
@@ -2382,7 +2382,7 @@
           <a:p>
             <a:fld id="{CDDC06C2-7DBC-4F52-9B39-8D808E2DB5D5}" type="datetimeFigureOut">
               <a:rPr lang="en-US" smtClean="0"/>
-              <a:t>8/30/2026</a:t>
+              <a:t>9/8/2026</a:t>
             </a:fld>
             <a:endParaRPr lang="en-US"/>
           </a:p>
@@ -2595,7 +2595,7 @@
           <a:p>
             <a:fld id="{CDDC06C2-7DBC-4F52-9B39-8D808E2DB5D5}" type="datetimeFigureOut">
               <a:rPr lang="en-US" smtClean="0"/>
-              <a:t>8/30/2026</a:t>
+              <a:t>9/8/2026</a:t>
             </a:fld>
             <a:endParaRPr lang="en-US"/>
           </a:p>
@@ -3235,7 +3235,7 @@
           </a:bodyPr>
           <a:lstStyle/>
           <a:p>
-            <a:pPr marL="164485" algn="just" rtl="1">
+            <a:pPr marL="164485" algn="r" rtl="1">
               <a:lnSpc>
                 <a:spcPct val="200000"/>
               </a:lnSpc>
@@ -3255,7 +3255,7 @@
             </a:endParaRPr>
           </a:p>
           <a:p>
-            <a:pPr marL="164485" algn="just" rtl="1">
+            <a:pPr marL="164485" algn="r" rtl="1">
               <a:lnSpc>
                 <a:spcPct val="200000"/>
               </a:lnSpc>
@@ -3290,10 +3290,18 @@
                 <a:ea typeface="Times New Roman" panose="02020603050405020304" pitchFamily="18" charset="0"/>
                 <a:cs typeface="IRLotus" panose="02000503000000020002" pitchFamily="2" charset="-78"/>
               </a:rPr>
-              <a:t> به شماره ملی </a:t>
-            </a:r>
-            <a:r>
-              <a:rPr lang="en-US" dirty="0">
+              <a:t> </a:t>
+            </a:r>
+            <a:r>
+              <a:rPr lang="fa-IR" sz="2400" dirty="0">
+                <a:latin typeface="IRLotus" panose="02000503000000020002" pitchFamily="2" charset="-78"/>
+                <a:ea typeface="Times New Roman" panose="02020603050405020304" pitchFamily="18" charset="0"/>
+                <a:cs typeface="IRLotus" panose="02000503000000020002" pitchFamily="2" charset="-78"/>
+              </a:rPr>
+              <a:t>به شماره ملی </a:t>
+            </a:r>
+            <a:r>
+              <a:rPr lang="en-US" b="1" dirty="0">
                 <a:latin typeface="Vazirmatn FD" panose="020B0604020202020204" charset="-78"/>
                 <a:ea typeface="Times New Roman" panose="02020603050405020304" pitchFamily="18" charset="0"/>
                 <a:cs typeface="Vazirmatn FD" panose="020B0604020202020204" charset="-78"/>
@@ -3301,7 +3309,7 @@
               <a:t>{{national}}</a:t>
             </a:r>
             <a:r>
-              <a:rPr lang="fa-IR" sz="2000" dirty="0">
+              <a:rPr lang="fa-IR" sz="2000" b="1" dirty="0">
                 <a:latin typeface="Vazirmatn FD" panose="020B0604020202020204" charset="-78"/>
                 <a:ea typeface="Times New Roman" panose="02020603050405020304" pitchFamily="18" charset="0"/>
                 <a:cs typeface="Vazirmatn FD" panose="020B0604020202020204" charset="-78"/>
@@ -3639,7 +3647,7 @@
                   <a:latin typeface="IRLotus" panose="02000503000000020002" pitchFamily="2" charset="-78"/>
                   <a:cs typeface="IRLotus" panose="02000503000000020002" pitchFamily="2" charset="-78"/>
                 </a:rPr>
-                <a:t>     گواهی شرکت در  دوره آموزشی</a:t>
+                <a:t>     گواهی شرکت در  دوره</a:t>
               </a:r>
               <a:endParaRPr lang="en-US" sz="1600" dirty="0">
                 <a:latin typeface="IRLotus" panose="02000503000000020002" pitchFamily="2" charset="-78"/>
@@ -3692,6 +3700,95 @@
       </p:sp>
       <p:sp>
         <p:nvSpPr>
+          <p:cNvPr id="20" name="TextBox 19">
+            <a:extLst>
+              <a:ext uri="{FF2B5EF4-FFF2-40B4-BE49-F238E27FC236}">
+                <a16:creationId xmlns:a16="http://schemas.microsoft.com/office/drawing/2014/main" id="{2ECCFE09-8D5F-4C32-B4C3-C8E2F5700BB9}"/>
+              </a:ext>
+            </a:extLst>
+          </p:cNvPr>
+          <p:cNvSpPr txBox="1"/>
+          <p:nvPr/>
+        </p:nvSpPr>
+        <p:spPr>
+          <a:xfrm>
+            <a:off x="3284480" y="6604565"/>
+            <a:ext cx="1401345" cy="646331"/>
+          </a:xfrm>
+          <a:prstGeom prst="rect">
+            <a:avLst/>
+          </a:prstGeom>
+          <a:noFill/>
+        </p:spPr>
+        <p:txBody>
+          <a:bodyPr wrap="none" rtlCol="0">
+            <a:spAutoFit/>
+          </a:bodyPr>
+          <a:lstStyle/>
+          <a:p>
+            <a:pPr algn="ctr" rtl="1"/>
+            <a:r>
+              <a:rPr lang="en-US" sz="1200" dirty="0">
+                <a:solidFill>
+                  <a:schemeClr val="bg1"/>
+                </a:solidFill>
+                <a:latin typeface="IRLotus" panose="02000503000000020002" pitchFamily="2" charset="-78"/>
+                <a:cs typeface="IRLotus" panose="02000503000000020002" pitchFamily="2" charset="-78"/>
+              </a:rPr>
+              <a:t>{{signatory2}}</a:t>
+            </a:r>
+            <a:endParaRPr lang="fa-IR" sz="1200" dirty="0">
+              <a:solidFill>
+                <a:schemeClr val="bg1"/>
+              </a:solidFill>
+              <a:latin typeface="IRLotus" panose="02000503000000020002" pitchFamily="2" charset="-78"/>
+              <a:cs typeface="IRLotus" panose="02000503000000020002" pitchFamily="2" charset="-78"/>
+            </a:endParaRPr>
+          </a:p>
+          <a:p>
+            <a:pPr algn="ctr" rtl="1"/>
+            <a:r>
+              <a:rPr lang="en-US" sz="1200" dirty="0">
+                <a:solidFill>
+                  <a:schemeClr val="bg1"/>
+                </a:solidFill>
+                <a:latin typeface="IRLotus" panose="02000503000000020002" pitchFamily="2" charset="-78"/>
+                <a:cs typeface="IRLotus" panose="02000503000000020002" pitchFamily="2" charset="-78"/>
+              </a:rPr>
+              <a:t>{{position2}}</a:t>
+            </a:r>
+            <a:endParaRPr lang="fa-IR" sz="1200" dirty="0">
+              <a:solidFill>
+                <a:schemeClr val="bg1"/>
+              </a:solidFill>
+              <a:latin typeface="IRLotus" panose="02000503000000020002" pitchFamily="2" charset="-78"/>
+              <a:cs typeface="IRLotus" panose="02000503000000020002" pitchFamily="2" charset="-78"/>
+            </a:endParaRPr>
+          </a:p>
+          <a:p>
+            <a:pPr algn="ctr" rtl="1"/>
+            <a:r>
+              <a:rPr lang="fa-IR" sz="1200" dirty="0">
+                <a:solidFill>
+                  <a:schemeClr val="bg1"/>
+                </a:solidFill>
+                <a:latin typeface="IRLotus" panose="02000503000000020002" pitchFamily="2" charset="-78"/>
+                <a:cs typeface="IRLotus" panose="02000503000000020002" pitchFamily="2" charset="-78"/>
+              </a:rPr>
+              <a:t>مجتمع آموزش عالی ﻻرستان</a:t>
+            </a:r>
+            <a:endParaRPr lang="en-US" sz="1200" dirty="0">
+              <a:solidFill>
+                <a:schemeClr val="bg1"/>
+              </a:solidFill>
+              <a:latin typeface="IRLotus" panose="02000503000000020002" pitchFamily="2" charset="-78"/>
+              <a:cs typeface="IRLotus" panose="02000503000000020002" pitchFamily="2" charset="-78"/>
+            </a:endParaRPr>
+          </a:p>
+        </p:txBody>
+      </p:sp>
+      <p:sp>
+        <p:nvSpPr>
           <p:cNvPr id="3" name="Rectangle 2">
             <a:extLst>
               <a:ext uri="{FF2B5EF4-FFF2-40B4-BE49-F238E27FC236}">
@@ -3704,7 +3801,7 @@
         </p:nvSpPr>
         <p:spPr>
           <a:xfrm>
-            <a:off x="6906334" y="5930111"/>
+            <a:off x="7670327" y="5926856"/>
             <a:ext cx="1171137" cy="1170628"/>
           </a:xfrm>
           <a:prstGeom prst="rect">
@@ -3758,72 +3855,6 @@
       </p:sp>
       <p:sp>
         <p:nvSpPr>
-          <p:cNvPr id="16" name="Rectangle 15">
-            <a:extLst>
-              <a:ext uri="{FF2B5EF4-FFF2-40B4-BE49-F238E27FC236}">
-                <a16:creationId xmlns:a16="http://schemas.microsoft.com/office/drawing/2014/main" id="{A7CC39C9-8A99-4525-8257-0D2F390F32EF}"/>
-              </a:ext>
-            </a:extLst>
-          </p:cNvPr>
-          <p:cNvSpPr/>
-          <p:nvPr/>
-        </p:nvSpPr>
-        <p:spPr>
-          <a:xfrm>
-            <a:off x="371013" y="5433937"/>
-            <a:ext cx="2335255" cy="1170628"/>
-          </a:xfrm>
-          <a:prstGeom prst="rect">
-            <a:avLst/>
-          </a:prstGeom>
-        </p:spPr>
-        <p:style>
-          <a:lnRef idx="2">
-            <a:schemeClr val="accent1">
-              <a:shade val="50000"/>
-            </a:schemeClr>
-          </a:lnRef>
-          <a:fillRef idx="1">
-            <a:schemeClr val="accent1"/>
-          </a:fillRef>
-          <a:effectRef idx="0">
-            <a:schemeClr val="accent1"/>
-          </a:effectRef>
-          <a:fontRef idx="minor">
-            <a:schemeClr val="lt1"/>
-          </a:fontRef>
-        </p:style>
-        <p:txBody>
-          <a:bodyPr rtlCol="0" anchor="ctr"/>
-          <a:lstStyle/>
-          <a:p>
-            <a:pPr algn="ctr"/>
-            <a:r>
-              <a:rPr lang="en-US" sz="2115" dirty="0">
-                <a:latin typeface="Vazirmatn FD" pitchFamily="2" charset="-78"/>
-                <a:cs typeface="Vazirmatn FD" pitchFamily="2" charset="-78"/>
-              </a:rPr>
-              <a:t>{{</a:t>
-            </a:r>
-            <a:r>
-              <a:rPr lang="en-US" sz="2115" dirty="0" err="1">
-                <a:latin typeface="Vazirmatn FD" pitchFamily="2" charset="-78"/>
-                <a:cs typeface="Vazirmatn FD" pitchFamily="2" charset="-78"/>
-              </a:rPr>
-              <a:t>image:logo</a:t>
-            </a:r>
-            <a:r>
-              <a:rPr lang="en-US" sz="2115" dirty="0">
-                <a:latin typeface="Vazirmatn FD" pitchFamily="2" charset="-78"/>
-                <a:cs typeface="Vazirmatn FD" pitchFamily="2" charset="-78"/>
-              </a:rPr>
-              <a:t>}}</a:t>
-            </a:r>
-          </a:p>
-        </p:txBody>
-      </p:sp>
-      <p:sp>
-        <p:nvSpPr>
           <p:cNvPr id="18" name="Rectangle 17">
             <a:extLst>
               <a:ext uri="{FF2B5EF4-FFF2-40B4-BE49-F238E27FC236}">
@@ -3836,7 +3867,7 @@
         </p:nvSpPr>
         <p:spPr>
           <a:xfrm>
-            <a:off x="8195433" y="5946023"/>
+            <a:off x="8988252" y="5942768"/>
             <a:ext cx="1153551" cy="1154716"/>
           </a:xfrm>
           <a:prstGeom prst="rect">
@@ -3900,10 +3931,10 @@
       </p:sp>
       <p:sp>
         <p:nvSpPr>
-          <p:cNvPr id="20" name="TextBox 19">
+          <p:cNvPr id="32" name="TextBox 31">
             <a:extLst>
               <a:ext uri="{FF2B5EF4-FFF2-40B4-BE49-F238E27FC236}">
-                <a16:creationId xmlns:a16="http://schemas.microsoft.com/office/drawing/2014/main" id="{2ECCFE09-8D5F-4C32-B4C3-C8E2F5700BB9}"/>
+                <a16:creationId xmlns:a16="http://schemas.microsoft.com/office/drawing/2014/main" id="{7F2B97B8-79C4-C490-49C2-DC27C0766240}"/>
               </a:ext>
             </a:extLst>
           </p:cNvPr>
@@ -3912,7 +3943,7 @@
         </p:nvSpPr>
         <p:spPr>
           <a:xfrm>
-            <a:off x="3284480" y="6604565"/>
+            <a:off x="865949" y="6617304"/>
             <a:ext cx="1401345" cy="646331"/>
           </a:xfrm>
           <a:prstGeom prst="rect">
@@ -3929,12 +3960,18 @@
             <a:pPr algn="ctr" rtl="1"/>
             <a:r>
               <a:rPr lang="en-US" sz="1200" dirty="0">
+                <a:solidFill>
+                  <a:schemeClr val="bg1"/>
+                </a:solidFill>
                 <a:latin typeface="IRLotus" panose="02000503000000020002" pitchFamily="2" charset="-78"/>
                 <a:cs typeface="IRLotus" panose="02000503000000020002" pitchFamily="2" charset="-78"/>
               </a:rPr>
-              <a:t>{{signatory2}}</a:t>
+              <a:t>{{signatory}}</a:t>
             </a:r>
             <a:endParaRPr lang="fa-IR" sz="1200" dirty="0">
+              <a:solidFill>
+                <a:schemeClr val="bg1"/>
+              </a:solidFill>
               <a:latin typeface="IRLotus" panose="02000503000000020002" pitchFamily="2" charset="-78"/>
               <a:cs typeface="IRLotus" panose="02000503000000020002" pitchFamily="2" charset="-78"/>
             </a:endParaRPr>
@@ -3943,12 +3980,18 @@
             <a:pPr algn="ctr" rtl="1"/>
             <a:r>
               <a:rPr lang="en-US" sz="1200" dirty="0">
+                <a:solidFill>
+                  <a:schemeClr val="bg1"/>
+                </a:solidFill>
                 <a:latin typeface="IRLotus" panose="02000503000000020002" pitchFamily="2" charset="-78"/>
                 <a:cs typeface="IRLotus" panose="02000503000000020002" pitchFamily="2" charset="-78"/>
               </a:rPr>
-              <a:t>{{position2}}</a:t>
+              <a:t>{{position}}</a:t>
             </a:r>
             <a:endParaRPr lang="fa-IR" sz="1200" dirty="0">
+              <a:solidFill>
+                <a:schemeClr val="bg1"/>
+              </a:solidFill>
               <a:latin typeface="IRLotus" panose="02000503000000020002" pitchFamily="2" charset="-78"/>
               <a:cs typeface="IRLotus" panose="02000503000000020002" pitchFamily="2" charset="-78"/>
             </a:endParaRPr>
@@ -3957,12 +4000,18 @@
             <a:pPr algn="ctr" rtl="1"/>
             <a:r>
               <a:rPr lang="fa-IR" sz="1200" dirty="0">
+                <a:solidFill>
+                  <a:schemeClr val="bg1"/>
+                </a:solidFill>
                 <a:latin typeface="IRLotus" panose="02000503000000020002" pitchFamily="2" charset="-78"/>
                 <a:cs typeface="IRLotus" panose="02000503000000020002" pitchFamily="2" charset="-78"/>
               </a:rPr>
               <a:t>مجتمع آموزش عالی ﻻرستان</a:t>
             </a:r>
             <a:endParaRPr lang="en-US" sz="1200" dirty="0">
+              <a:solidFill>
+                <a:schemeClr val="bg1"/>
+              </a:solidFill>
               <a:latin typeface="IRLotus" panose="02000503000000020002" pitchFamily="2" charset="-78"/>
               <a:cs typeface="IRLotus" panose="02000503000000020002" pitchFamily="2" charset="-78"/>
             </a:endParaRPr>
@@ -3971,114 +4020,10 @@
       </p:sp>
       <p:sp>
         <p:nvSpPr>
-          <p:cNvPr id="22" name="Rectangle 21">
+          <p:cNvPr id="8" name="Freeform: Shape 7">
             <a:extLst>
               <a:ext uri="{FF2B5EF4-FFF2-40B4-BE49-F238E27FC236}">
-                <a16:creationId xmlns:a16="http://schemas.microsoft.com/office/drawing/2014/main" id="{8CF98FAC-1348-4439-B65B-E5A09FC50C41}"/>
-              </a:ext>
-            </a:extLst>
-          </p:cNvPr>
-          <p:cNvSpPr/>
-          <p:nvPr/>
-        </p:nvSpPr>
-        <p:spPr>
-          <a:xfrm>
-            <a:off x="5617235" y="5930111"/>
-            <a:ext cx="1171137" cy="1170628"/>
-          </a:xfrm>
-          <a:prstGeom prst="rect">
-            <a:avLst/>
-          </a:prstGeom>
-        </p:spPr>
-        <p:style>
-          <a:lnRef idx="2">
-            <a:schemeClr val="accent1">
-              <a:shade val="50000"/>
-            </a:schemeClr>
-          </a:lnRef>
-          <a:fillRef idx="1">
-            <a:schemeClr val="accent1"/>
-          </a:fillRef>
-          <a:effectRef idx="0">
-            <a:schemeClr val="accent1"/>
-          </a:effectRef>
-          <a:fontRef idx="minor">
-            <a:schemeClr val="lt1"/>
-          </a:fontRef>
-        </p:style>
-        <p:txBody>
-          <a:bodyPr rtlCol="0" anchor="ctr"/>
-          <a:lstStyle/>
-          <a:p>
-            <a:pPr algn="ctr"/>
-            <a:r>
-              <a:rPr lang="en-US" sz="2115" dirty="0">
-                <a:latin typeface="Vazirmatn FD" pitchFamily="2" charset="-78"/>
-                <a:cs typeface="Vazirmatn FD" pitchFamily="2" charset="-78"/>
-              </a:rPr>
-              <a:t>{{image:photo2}}</a:t>
-            </a:r>
-          </a:p>
-        </p:txBody>
-      </p:sp>
-      <p:sp>
-        <p:nvSpPr>
-          <p:cNvPr id="23" name="Rectangle 22">
-            <a:extLst>
-              <a:ext uri="{FF2B5EF4-FFF2-40B4-BE49-F238E27FC236}">
-                <a16:creationId xmlns:a16="http://schemas.microsoft.com/office/drawing/2014/main" id="{084D68AF-F57F-46F5-9C59-C6AC8B16F85E}"/>
-              </a:ext>
-            </a:extLst>
-          </p:cNvPr>
-          <p:cNvSpPr/>
-          <p:nvPr/>
-        </p:nvSpPr>
-        <p:spPr>
-          <a:xfrm>
-            <a:off x="2817526" y="5433937"/>
-            <a:ext cx="2335255" cy="1170628"/>
-          </a:xfrm>
-          <a:prstGeom prst="rect">
-            <a:avLst/>
-          </a:prstGeom>
-        </p:spPr>
-        <p:style>
-          <a:lnRef idx="2">
-            <a:schemeClr val="accent1">
-              <a:shade val="50000"/>
-            </a:schemeClr>
-          </a:lnRef>
-          <a:fillRef idx="1">
-            <a:schemeClr val="accent1"/>
-          </a:fillRef>
-          <a:effectRef idx="0">
-            <a:schemeClr val="accent1"/>
-          </a:effectRef>
-          <a:fontRef idx="minor">
-            <a:schemeClr val="lt1"/>
-          </a:fontRef>
-        </p:style>
-        <p:txBody>
-          <a:bodyPr rtlCol="0" anchor="ctr"/>
-          <a:lstStyle/>
-          <a:p>
-            <a:pPr algn="ctr"/>
-            <a:r>
-              <a:rPr lang="en-US" sz="2115" dirty="0">
-                <a:latin typeface="Vazirmatn FD" pitchFamily="2" charset="-78"/>
-                <a:cs typeface="Vazirmatn FD" pitchFamily="2" charset="-78"/>
-              </a:rPr>
-              <a:t>{{image:logo2}}</a:t>
-            </a:r>
-          </a:p>
-        </p:txBody>
-      </p:sp>
-      <p:sp>
-        <p:nvSpPr>
-          <p:cNvPr id="24" name="Freeform: Shape 23">
-            <a:extLst>
-              <a:ext uri="{FF2B5EF4-FFF2-40B4-BE49-F238E27FC236}">
-                <a16:creationId xmlns:a16="http://schemas.microsoft.com/office/drawing/2014/main" id="{AA570F66-3C66-FA9A-7F70-7EF1E47A59CB}"/>
+                <a16:creationId xmlns:a16="http://schemas.microsoft.com/office/drawing/2014/main" id="{FC87463F-7618-7508-65BC-943D156B612E}"/>
               </a:ext>
             </a:extLst>
           </p:cNvPr>
@@ -4200,100 +4145,10 @@
       </p:sp>
       <p:sp>
         <p:nvSpPr>
-          <p:cNvPr id="26" name="TextBox 25">
+          <p:cNvPr id="17" name="TextBox 16">
             <a:extLst>
               <a:ext uri="{FF2B5EF4-FFF2-40B4-BE49-F238E27FC236}">
-                <a16:creationId xmlns:a16="http://schemas.microsoft.com/office/drawing/2014/main" id="{C110934A-0D27-38FA-7167-7AF243CE7189}"/>
-              </a:ext>
-            </a:extLst>
-          </p:cNvPr>
-          <p:cNvSpPr txBox="1"/>
-          <p:nvPr/>
-        </p:nvSpPr>
-        <p:spPr>
-          <a:xfrm>
-            <a:off x="1027456" y="781794"/>
-            <a:ext cx="693922" cy="307777"/>
-          </a:xfrm>
-          <a:prstGeom prst="rect">
-            <a:avLst/>
-          </a:prstGeom>
-          <a:noFill/>
-        </p:spPr>
-        <p:txBody>
-          <a:bodyPr wrap="square" rtlCol="0">
-            <a:spAutoFit/>
-          </a:bodyPr>
-          <a:lstStyle/>
-          <a:p>
-            <a:pPr algn="r" rtl="1"/>
-            <a:r>
-              <a:rPr lang="fa-IR" sz="1400" b="1" dirty="0">
-                <a:solidFill>
-                  <a:schemeClr val="bg1"/>
-                </a:solidFill>
-                <a:latin typeface="IRLotus" panose="02000503000000020002" pitchFamily="2" charset="-78"/>
-                <a:cs typeface="IRLotus" panose="02000503000000020002" pitchFamily="2" charset="-78"/>
-              </a:rPr>
-              <a:t>شماره:</a:t>
-            </a:r>
-            <a:endParaRPr lang="en-US" sz="1400" b="1" dirty="0">
-              <a:solidFill>
-                <a:schemeClr val="bg1"/>
-              </a:solidFill>
-              <a:latin typeface="IRLotus" panose="02000503000000020002" pitchFamily="2" charset="-78"/>
-              <a:cs typeface="IRLotus" panose="02000503000000020002" pitchFamily="2" charset="-78"/>
-            </a:endParaRPr>
-          </a:p>
-        </p:txBody>
-      </p:sp>
-      <p:sp>
-        <p:nvSpPr>
-          <p:cNvPr id="28" name="TextBox 27">
-            <a:extLst>
-              <a:ext uri="{FF2B5EF4-FFF2-40B4-BE49-F238E27FC236}">
-                <a16:creationId xmlns:a16="http://schemas.microsoft.com/office/drawing/2014/main" id="{DC7208E6-E564-EC5B-235F-36796055F54F}"/>
-              </a:ext>
-            </a:extLst>
-          </p:cNvPr>
-          <p:cNvSpPr txBox="1"/>
-          <p:nvPr/>
-        </p:nvSpPr>
-        <p:spPr>
-          <a:xfrm>
-            <a:off x="212446" y="800896"/>
-            <a:ext cx="1326195" cy="261610"/>
-          </a:xfrm>
-          <a:prstGeom prst="rect">
-            <a:avLst/>
-          </a:prstGeom>
-          <a:noFill/>
-        </p:spPr>
-        <p:txBody>
-          <a:bodyPr wrap="square">
-            <a:spAutoFit/>
-          </a:bodyPr>
-          <a:lstStyle/>
-          <a:p>
-            <a:r>
-              <a:rPr lang="en-US" sz="1100" b="1" dirty="0">
-                <a:solidFill>
-                  <a:schemeClr val="bg1"/>
-                </a:solidFill>
-                <a:latin typeface="Vazirmatn FD" panose="020B0604020202020204" charset="-78"/>
-                <a:cs typeface="Vazirmatn FD" panose="020B0604020202020204" charset="-78"/>
-              </a:rPr>
-              <a:t>{{number}}</a:t>
-            </a:r>
-          </a:p>
-        </p:txBody>
-      </p:sp>
-      <p:sp>
-        <p:nvSpPr>
-          <p:cNvPr id="30" name="TextBox 29">
-            <a:extLst>
-              <a:ext uri="{FF2B5EF4-FFF2-40B4-BE49-F238E27FC236}">
-                <a16:creationId xmlns:a16="http://schemas.microsoft.com/office/drawing/2014/main" id="{CDE4FBED-8F89-9C3B-1059-3398E102493A}"/>
+                <a16:creationId xmlns:a16="http://schemas.microsoft.com/office/drawing/2014/main" id="{58F8C1BD-C2DC-371C-00E6-D4A4F8BD284B}"/>
               </a:ext>
             </a:extLst>
           </p:cNvPr>
@@ -4349,10 +4204,10 @@
       </p:sp>
       <p:sp>
         <p:nvSpPr>
-          <p:cNvPr id="32" name="TextBox 31">
+          <p:cNvPr id="21" name="TextBox 20">
             <a:extLst>
               <a:ext uri="{FF2B5EF4-FFF2-40B4-BE49-F238E27FC236}">
-                <a16:creationId xmlns:a16="http://schemas.microsoft.com/office/drawing/2014/main" id="{7F2B97B8-79C4-C490-49C2-DC27C0766240}"/>
+                <a16:creationId xmlns:a16="http://schemas.microsoft.com/office/drawing/2014/main" id="{598D8724-0A47-D0E7-E060-B801FC3FCB03}"/>
               </a:ext>
             </a:extLst>
           </p:cNvPr>
@@ -4361,8 +4216,8 @@
         </p:nvSpPr>
         <p:spPr>
           <a:xfrm>
-            <a:off x="865949" y="6617304"/>
-            <a:ext cx="1401345" cy="646331"/>
+            <a:off x="-353246" y="781794"/>
+            <a:ext cx="2074624" cy="307777"/>
           </a:xfrm>
           <a:prstGeom prst="rect">
             <a:avLst/>
@@ -4370,51 +4225,202 @@
           <a:noFill/>
         </p:spPr>
         <p:txBody>
-          <a:bodyPr wrap="none" rtlCol="0">
+          <a:bodyPr wrap="square" rtlCol="0">
             <a:spAutoFit/>
           </a:bodyPr>
           <a:lstStyle/>
           <a:p>
-            <a:pPr algn="ctr" rtl="1"/>
-            <a:r>
-              <a:rPr lang="en-US" sz="1200" dirty="0">
+            <a:pPr algn="r" rtl="1"/>
+            <a:r>
+              <a:rPr lang="fa-IR" sz="1400" b="1" dirty="0">
+                <a:solidFill>
+                  <a:schemeClr val="bg1"/>
+                </a:solidFill>
                 <a:latin typeface="IRLotus" panose="02000503000000020002" pitchFamily="2" charset="-78"/>
                 <a:cs typeface="IRLotus" panose="02000503000000020002" pitchFamily="2" charset="-78"/>
               </a:rPr>
-              <a:t>{{signatory}}</a:t>
-            </a:r>
-            <a:endParaRPr lang="fa-IR" sz="1200" dirty="0">
-              <a:latin typeface="IRLotus" panose="02000503000000020002" pitchFamily="2" charset="-78"/>
-              <a:cs typeface="IRLotus" panose="02000503000000020002" pitchFamily="2" charset="-78"/>
-            </a:endParaRPr>
-          </a:p>
-          <a:p>
-            <a:pPr algn="ctr" rtl="1"/>
-            <a:r>
-              <a:rPr lang="en-US" sz="1200" dirty="0">
-                <a:latin typeface="IRLotus" panose="02000503000000020002" pitchFamily="2" charset="-78"/>
-                <a:cs typeface="IRLotus" panose="02000503000000020002" pitchFamily="2" charset="-78"/>
+              <a:t>شماره:  </a:t>
+            </a:r>
+            <a:r>
+              <a:rPr lang="en-US" sz="1100" b="1" dirty="0">
+                <a:solidFill>
+                  <a:schemeClr val="bg1"/>
+                </a:solidFill>
+                <a:latin typeface="Vazirmatn FD" panose="020B0604020202020204" charset="-78"/>
+                <a:cs typeface="Vazirmatn FD" panose="020B0604020202020204" charset="-78"/>
               </a:rPr>
-              <a:t>{{position}}</a:t>
-            </a:r>
-            <a:endParaRPr lang="fa-IR" sz="1200" dirty="0">
-              <a:latin typeface="IRLotus" panose="02000503000000020002" pitchFamily="2" charset="-78"/>
-              <a:cs typeface="IRLotus" panose="02000503000000020002" pitchFamily="2" charset="-78"/>
-            </a:endParaRPr>
-          </a:p>
-          <a:p>
-            <a:pPr algn="ctr" rtl="1"/>
-            <a:r>
-              <a:rPr lang="fa-IR" sz="1200" dirty="0">
-                <a:latin typeface="IRLotus" panose="02000503000000020002" pitchFamily="2" charset="-78"/>
-                <a:cs typeface="IRLotus" panose="02000503000000020002" pitchFamily="2" charset="-78"/>
+              <a:t>{{number}}</a:t>
+            </a:r>
+          </a:p>
+        </p:txBody>
+      </p:sp>
+      <p:sp>
+        <p:nvSpPr>
+          <p:cNvPr id="12" name="Rectangle 11">
+            <a:extLst>
+              <a:ext uri="{FF2B5EF4-FFF2-40B4-BE49-F238E27FC236}">
+                <a16:creationId xmlns:a16="http://schemas.microsoft.com/office/drawing/2014/main" id="{583EBFC9-A440-DF6C-045F-18BAF932CA66}"/>
+              </a:ext>
+            </a:extLst>
+          </p:cNvPr>
+          <p:cNvSpPr/>
+          <p:nvPr/>
+        </p:nvSpPr>
+        <p:spPr>
+          <a:xfrm>
+            <a:off x="450717" y="4915399"/>
+            <a:ext cx="3140208" cy="2182085"/>
+          </a:xfrm>
+          <a:prstGeom prst="rect">
+            <a:avLst/>
+          </a:prstGeom>
+        </p:spPr>
+        <p:style>
+          <a:lnRef idx="2">
+            <a:schemeClr val="accent1">
+              <a:shade val="50000"/>
+            </a:schemeClr>
+          </a:lnRef>
+          <a:fillRef idx="1">
+            <a:schemeClr val="accent1"/>
+          </a:fillRef>
+          <a:effectRef idx="0">
+            <a:schemeClr val="accent1"/>
+          </a:effectRef>
+          <a:fontRef idx="minor">
+            <a:schemeClr val="lt1"/>
+          </a:fontRef>
+        </p:style>
+        <p:txBody>
+          <a:bodyPr rtlCol="0" anchor="ctr"/>
+          <a:lstStyle/>
+          <a:p>
+            <a:pPr algn="ctr"/>
+            <a:r>
+              <a:rPr lang="en-US" sz="2115" dirty="0">
+                <a:latin typeface="Vazirmatn FD" pitchFamily="2" charset="-78"/>
+                <a:cs typeface="Vazirmatn FD" pitchFamily="2" charset="-78"/>
               </a:rPr>
-              <a:t>مجتمع آموزش عالی ﻻرستان</a:t>
-            </a:r>
-            <a:endParaRPr lang="en-US" sz="1200" dirty="0">
-              <a:latin typeface="IRLotus" panose="02000503000000020002" pitchFamily="2" charset="-78"/>
-              <a:cs typeface="IRLotus" panose="02000503000000020002" pitchFamily="2" charset="-78"/>
-            </a:endParaRPr>
+              <a:t>{{</a:t>
+            </a:r>
+            <a:r>
+              <a:rPr lang="en-US" sz="2115" dirty="0" err="1">
+                <a:latin typeface="Vazirmatn FD" pitchFamily="2" charset="-78"/>
+                <a:cs typeface="Vazirmatn FD" pitchFamily="2" charset="-78"/>
+              </a:rPr>
+              <a:t>image:logo</a:t>
+            </a:r>
+            <a:r>
+              <a:rPr lang="en-US" sz="2115" dirty="0">
+                <a:latin typeface="Vazirmatn FD" pitchFamily="2" charset="-78"/>
+                <a:cs typeface="Vazirmatn FD" pitchFamily="2" charset="-78"/>
+              </a:rPr>
+              <a:t>}}</a:t>
+            </a:r>
+          </a:p>
+        </p:txBody>
+      </p:sp>
+      <p:sp>
+        <p:nvSpPr>
+          <p:cNvPr id="19" name="Rectangle 18">
+            <a:extLst>
+              <a:ext uri="{FF2B5EF4-FFF2-40B4-BE49-F238E27FC236}">
+                <a16:creationId xmlns:a16="http://schemas.microsoft.com/office/drawing/2014/main" id="{759E82B2-9067-BE8A-031A-BA52A3DA2726}"/>
+              </a:ext>
+            </a:extLst>
+          </p:cNvPr>
+          <p:cNvSpPr/>
+          <p:nvPr/>
+        </p:nvSpPr>
+        <p:spPr>
+          <a:xfrm>
+            <a:off x="3629326" y="4915399"/>
+            <a:ext cx="3140208" cy="2182085"/>
+          </a:xfrm>
+          <a:prstGeom prst="rect">
+            <a:avLst/>
+          </a:prstGeom>
+        </p:spPr>
+        <p:style>
+          <a:lnRef idx="2">
+            <a:schemeClr val="accent1">
+              <a:shade val="50000"/>
+            </a:schemeClr>
+          </a:lnRef>
+          <a:fillRef idx="1">
+            <a:schemeClr val="accent1"/>
+          </a:fillRef>
+          <a:effectRef idx="0">
+            <a:schemeClr val="accent1"/>
+          </a:effectRef>
+          <a:fontRef idx="minor">
+            <a:schemeClr val="lt1"/>
+          </a:fontRef>
+        </p:style>
+        <p:txBody>
+          <a:bodyPr rtlCol="0" anchor="ctr"/>
+          <a:lstStyle/>
+          <a:p>
+            <a:pPr algn="ctr"/>
+            <a:r>
+              <a:rPr lang="en-US" sz="2115" dirty="0">
+                <a:latin typeface="Vazirmatn FD" pitchFamily="2" charset="-78"/>
+                <a:cs typeface="Vazirmatn FD" pitchFamily="2" charset="-78"/>
+              </a:rPr>
+              <a:t>{{image:logo2}}</a:t>
+            </a:r>
+          </a:p>
+        </p:txBody>
+      </p:sp>
+      <p:sp>
+        <p:nvSpPr>
+          <p:cNvPr id="22" name="Rectangle 21">
+            <a:extLst>
+              <a:ext uri="{FF2B5EF4-FFF2-40B4-BE49-F238E27FC236}">
+                <a16:creationId xmlns:a16="http://schemas.microsoft.com/office/drawing/2014/main" id="{8CF98FAC-1348-4439-B65B-E5A09FC50C41}"/>
+              </a:ext>
+            </a:extLst>
+          </p:cNvPr>
+          <p:cNvSpPr/>
+          <p:nvPr/>
+        </p:nvSpPr>
+        <p:spPr>
+          <a:xfrm>
+            <a:off x="6352402" y="5926856"/>
+            <a:ext cx="1171137" cy="1170628"/>
+          </a:xfrm>
+          <a:prstGeom prst="rect">
+            <a:avLst/>
+          </a:prstGeom>
+        </p:spPr>
+        <p:style>
+          <a:lnRef idx="2">
+            <a:schemeClr val="accent1">
+              <a:shade val="50000"/>
+            </a:schemeClr>
+          </a:lnRef>
+          <a:fillRef idx="1">
+            <a:schemeClr val="accent1"/>
+          </a:fillRef>
+          <a:effectRef idx="0">
+            <a:schemeClr val="accent1"/>
+          </a:effectRef>
+          <a:fontRef idx="minor">
+            <a:schemeClr val="lt1"/>
+          </a:fontRef>
+        </p:style>
+        <p:txBody>
+          <a:bodyPr rtlCol="0" anchor="ctr"/>
+          <a:lstStyle/>
+          <a:p>
+            <a:pPr algn="ctr"/>
+            <a:r>
+              <a:rPr lang="en-US" sz="2115" dirty="0">
+                <a:latin typeface="Vazirmatn FD" pitchFamily="2" charset="-78"/>
+                <a:cs typeface="Vazirmatn FD" pitchFamily="2" charset="-78"/>
+              </a:rPr>
+              <a:t>{{image:photo2}}</a:t>
+            </a:r>
           </a:p>
         </p:txBody>
       </p:sp>
